--- a/Topic_E/Exam_Practice/TE-L01_Writing_Workshop_Countries_Nationalities_and_Languages.pptx
+++ b/Topic_E/Exam_Practice/TE-L01_Writing_Workshop_Countries_Nationalities_and_Languages.pptx
@@ -784,7 +784,11 @@
           <a:lstStyle/>
           <a:p>
             <a:r>
-              <a:rPr lang="en-US" dirty="0"/>
+              <a:rPr lang="ar-SA" dirty="0">
+                <a:latin typeface="Amiri" pitchFamily="2" charset="-78"/>
+                <a:ea typeface="Amiri" pitchFamily="2" charset="-78"/>
+                <a:cs typeface="Amiri" pitchFamily="2" charset="-78"/>
+              </a:rPr>
               <a:t>Q3 (3 min to choose and read). Title (أ) suits Core and Develop; title (ب) suits Stretch.</a:t>
             </a:r>
             <a:endParaRPr lang="en-US" dirty="0"/>
@@ -1403,7 +1407,11 @@
           <a:lstStyle/>
           <a:p>
             <a:r>
-              <a:rPr lang="en-US" dirty="0"/>
+              <a:rPr lang="ar-SA" dirty="0">
+                <a:latin typeface="Amiri" pitchFamily="2" charset="-78"/>
+                <a:ea typeface="Amiri" pitchFamily="2" charset="-78"/>
+                <a:cs typeface="Amiri" pitchFamily="2" charset="-78"/>
+              </a:rPr>
               <a:t>WELCOME (1 min) — while students join.
 • Greet each student by name as they arrive: السَّلَامُ عَلَيْكُمْ. Take the register (Pastoral Tracker: attendance 0/1).
 • 2-MINUTE CHECK-IN (SEND training): a private chat to any student who seemed unsettled last lesson — “Are you okay today? 👍 / 👎”.
@@ -1672,7 +1680,11 @@
           <a:lstStyle/>
           <a:p>
             <a:r>
-              <a:rPr lang="en-US" dirty="0"/>
+              <a:rPr lang="ar-SA" dirty="0">
+                <a:latin typeface="Amiri" pitchFamily="2" charset="-78"/>
+                <a:ea typeface="Amiri" pitchFamily="2" charset="-78"/>
+                <a:cs typeface="Amiri" pitchFamily="2" charset="-78"/>
+              </a:rPr>
               <a:t>QUESTION 1 — FORM FILLING. About 8 minutes. Core: boxes 1–6. Develop / Stretch: all 8. A girl writes بَرِيطَانِيَّةٌ in box 2. Box 4 takes the country (al-maghrib), not the nisba — a common slip.</a:t>
             </a:r>
             <a:endParaRPr lang="en-US" dirty="0"/>
@@ -1936,7 +1948,11 @@
           <a:lstStyle/>
           <a:p>
             <a:r>
-              <a:rPr lang="en-US" dirty="0"/>
+              <a:rPr lang="ar-SA" dirty="0">
+                <a:latin typeface="Amiri" pitchFamily="2" charset="-78"/>
+                <a:ea typeface="Amiri" pitchFamily="2" charset="-78"/>
+                <a:cs typeface="Amiri" pitchFamily="2" charset="-78"/>
+              </a:rPr>
               <a:t>Question words: أَيْنَ وُلِدْتَ (where were you born — PAST) · مَا جِنْسِيَّتُكَ (nationality — nisba) · مَعَ مَنْ (with whom) · سَتَتَعَلَّمُهَا (you will learn — FUTURE).</a:t>
             </a:r>
             <a:endParaRPr lang="en-US" dirty="0"/>
@@ -2508,6 +2524,7 @@
                   <a:srgbClr val="D4AF37"/>
                 </a:solidFill>
                 <a:latin typeface="Amiri" pitchFamily="2" charset="-78"/>
+                <a:ea typeface="Amiri" pitchFamily="2" charset="-78"/>
                 <a:cs typeface="Amiri" pitchFamily="2" charset="-78"/>
               </a:rPr>
               <a:t>م</a:t>
@@ -2714,6 +2731,7 @@
                   <a:srgbClr val="D4AF37"/>
                 </a:solidFill>
                 <a:latin typeface="Amiri" pitchFamily="2" charset="-78"/>
+                <a:ea typeface="Amiri" pitchFamily="2" charset="-78"/>
                 <a:cs typeface="Amiri" pitchFamily="2" charset="-78"/>
               </a:rPr>
               <a:t>وَرْشَةُ الكِتَابَةِ — البُلْدَانُ وَالجِنْسِيَّاتُ وَاللُّغَاتُ</a:t>
@@ -3171,6 +3189,7 @@
                   <a:srgbClr val="D4AF37"/>
                 </a:solidFill>
                 <a:latin typeface="Amiri" pitchFamily="2" charset="-78"/>
+                <a:ea typeface="Amiri" pitchFamily="2" charset="-78"/>
                 <a:cs typeface="Amiri" pitchFamily="2" charset="-78"/>
               </a:rPr>
               <a:t>م</a:t>
@@ -3491,6 +3510,7 @@
                   <a:srgbClr val="8A6D1E"/>
                 </a:solidFill>
                 <a:latin typeface="Amiri" pitchFamily="2" charset="-78"/>
+                <a:ea typeface="Amiri" pitchFamily="2" charset="-78"/>
                 <a:cs typeface="Amiri" pitchFamily="2" charset="-78"/>
               </a:rPr>
               <a:t>نَمُوذَجُ الإِجَابَةِ</a:t>
@@ -3604,6 +3624,7 @@
                   <a:srgbClr val="1F2A37"/>
                 </a:solidFill>
                 <a:latin typeface="Amiri" pitchFamily="2" charset="-78"/>
+                <a:ea typeface="Amiri" pitchFamily="2" charset="-78"/>
                 <a:cs typeface="Amiri" pitchFamily="2" charset="-78"/>
               </a:rPr>
               <a:t>مَرْحَبًا يَا كَرِيمُ،</a:t>
@@ -3623,6 +3644,7 @@
                   <a:srgbClr val="1F2A37"/>
                 </a:solidFill>
                 <a:latin typeface="Amiri" pitchFamily="2" charset="-78"/>
+                <a:ea typeface="Amiri" pitchFamily="2" charset="-78"/>
                 <a:cs typeface="Amiri" pitchFamily="2" charset="-78"/>
               </a:rPr>
               <a:t>اسْمِي عُمَرُ، وَعُمْرِي خَمْسَ عَشْرَةَ سَنَةً. وُلِدْتُ فِي مَدِينَةِ بِرْمِنْغْهَامَ فِي بَرِيطَانْيَا، لٰكِنَّ أَصْلَ أُسْرَتِي مِنَ المَغْرِبِ. أَنَا بَرِيطَانِيٌّ وَمَغْرِبِيٌّ أَيْضًا! يَقَعُ المَغْرِبُ فِي شَمَالِ إِفْرِيقْيَا، وَعَاصِمَتُهُ الرِّبَاطُ. أَتَكَلَّمُ ثَلَاثَ لُغَاتٍ: الإِنْجْلِيزِيَّةَ وَالعَرَبِيَّةَ وَالفَرَنْسِيَّةَ قَلِيلًا. فِي البَيْتِ أَتَكَلَّمُ العَرَبِيَّةَ مَعَ جَدَّتِي، وَفِي المَدْرَسَةِ أَتَكَلَّمُ الإِنْجْلِيزِيَّةَ. لُغَتِيَ المُفَضَّلَةُ العَرَبِيَّةُ، لِأَنَّهَا لُغَةُ القُرْآنِ وَلُغَةُ عَائِلَتِي. فِي المُسْتَقْبَلِ سَأَتَعَلَّمُ الإِسْبَانِيَّةَ. وَأَنْتَ، كَمْ لُغَةً تَتَكَلَّمُ؟</a:t>
@@ -3642,6 +3664,7 @@
                   <a:srgbClr val="1F2A37"/>
                 </a:solidFill>
                 <a:latin typeface="Amiri" pitchFamily="2" charset="-78"/>
+                <a:ea typeface="Amiri" pitchFamily="2" charset="-78"/>
                 <a:cs typeface="Amiri" pitchFamily="2" charset="-78"/>
               </a:rPr>
               <a:t>مَعَ السَّلَامَةِ،</a:t>
@@ -3661,6 +3684,7 @@
                   <a:srgbClr val="1F2A37"/>
                 </a:solidFill>
                 <a:latin typeface="Amiri" pitchFamily="2" charset="-78"/>
+                <a:ea typeface="Amiri" pitchFamily="2" charset="-78"/>
                 <a:cs typeface="Amiri" pitchFamily="2" charset="-78"/>
               </a:rPr>
               <a:t>عُمَرُ</a:t>
@@ -3824,11 +3848,12 @@
               <a:buNone/>
             </a:pPr>
             <a:r>
-              <a:rPr lang="en-US" sz="950" b="1" dirty="0">
+              <a:rPr lang="ar-SA" sz="950" b="1" dirty="0">
                 <a:solidFill>
                   <a:srgbClr val="FFFFFF"/>
                 </a:solidFill>
                 <a:latin typeface="Calibri" pitchFamily="34" charset="0"/>
+                <a:ea typeface="Amiri" pitchFamily="2" charset="-78"/>
                 <a:cs typeface="Amiri" pitchFamily="2" charset="-78"/>
               </a:rPr>
               <a:t>لٰكِنَّ أَصْلَ أُسْرَتِي</a:t>
@@ -3889,11 +3914,12 @@
               <a:buNone/>
             </a:pPr>
             <a:r>
-              <a:rPr lang="en-US" sz="950" b="1" dirty="0">
+              <a:rPr lang="ar-SA" sz="950" b="1" dirty="0">
                 <a:solidFill>
                   <a:srgbClr val="FFFFFF"/>
                 </a:solidFill>
                 <a:latin typeface="Calibri" pitchFamily="34" charset="0"/>
+                <a:ea typeface="Amiri" pitchFamily="2" charset="-78"/>
                 <a:cs typeface="Amiri" pitchFamily="2" charset="-78"/>
               </a:rPr>
               <a:t>بَرِيطَانِيٌّ وَمَغْرِبِيٌّ</a:t>
@@ -3954,11 +3980,12 @@
               <a:buNone/>
             </a:pPr>
             <a:r>
-              <a:rPr lang="en-US" sz="950" b="1" dirty="0">
+              <a:rPr lang="ar-SA" sz="950" b="1" dirty="0">
                 <a:solidFill>
                   <a:srgbClr val="FFFFFF"/>
                 </a:solidFill>
                 <a:latin typeface="Calibri" pitchFamily="34" charset="0"/>
+                <a:ea typeface="Amiri" pitchFamily="2" charset="-78"/>
                 <a:cs typeface="Amiri" pitchFamily="2" charset="-78"/>
               </a:rPr>
               <a:t>يَقَعُ المَغْرِبُ فِي</a:t>
@@ -4019,11 +4046,12 @@
               <a:buNone/>
             </a:pPr>
             <a:r>
-              <a:rPr lang="en-US" sz="950" b="1" dirty="0">
+              <a:rPr lang="ar-SA" sz="950" b="1" dirty="0">
                 <a:solidFill>
                   <a:srgbClr val="FFFFFF"/>
                 </a:solidFill>
                 <a:latin typeface="Calibri" pitchFamily="34" charset="0"/>
+                <a:ea typeface="Amiri" pitchFamily="2" charset="-78"/>
                 <a:cs typeface="Amiri" pitchFamily="2" charset="-78"/>
               </a:rPr>
               <a:t>مَعَ جَدَّتِي</a:t>
@@ -4157,6 +4185,7 @@
                   <a:srgbClr val="D4AF37"/>
                 </a:solidFill>
                 <a:latin typeface="Amiri" pitchFamily="2" charset="-78"/>
+                <a:ea typeface="Amiri" pitchFamily="2" charset="-78"/>
                 <a:cs typeface="Amiri" pitchFamily="2" charset="-78"/>
               </a:rPr>
               <a:t>م</a:t>
@@ -4477,6 +4506,7 @@
                   <a:srgbClr val="8A6D1E"/>
                 </a:solidFill>
                 <a:latin typeface="Amiri" pitchFamily="2" charset="-78"/>
+                <a:ea typeface="Amiri" pitchFamily="2" charset="-78"/>
                 <a:cs typeface="Amiri" pitchFamily="2" charset="-78"/>
               </a:rPr>
               <a:t>نَمُوذَجُ الإِجَابَةِ</a:t>
@@ -4590,6 +4620,7 @@
                   <a:srgbClr val="1F2A37"/>
                 </a:solidFill>
                 <a:latin typeface="Amiri" pitchFamily="2" charset="-78"/>
+                <a:ea typeface="Amiri" pitchFamily="2" charset="-78"/>
                 <a:cs typeface="Amiri" pitchFamily="2" charset="-78"/>
               </a:rPr>
               <a:t>عَزِيزِي كَرِيمُ،</a:t>
@@ -4609,6 +4640,7 @@
                   <a:srgbClr val="1F2A37"/>
                 </a:solidFill>
                 <a:latin typeface="Amiri" pitchFamily="2" charset="-78"/>
+                <a:ea typeface="Amiri" pitchFamily="2" charset="-78"/>
                 <a:cs typeface="Amiri" pitchFamily="2" charset="-78"/>
               </a:rPr>
               <a:t>يَسُرُّنِي أَنْ أَكُونَ صَدِيقَكَ بِالمُرَاسَلَةِ! اسْمِي عُمَرُ، وُلِدْتُ وَنَشَأْتُ فِي بِرْمِنْغْهَامَ، غَيْرَ أَنَّ جُذُورَ أُسْرَتِي مَغْرِبِيَّةٌ؛ فَأَنَا أَحْمِلُ الجِنْسِيَّتَيْنِ البَرِيطَانِيَّةَ وَالمَغْرِبِيَّةَ. يَقَعُ المَغْرِبُ فِي أَقْصَى شَمَالِ غَرْبِ إِفْرِيقْيَا، وَلَا يَفْصِلُهُ عَنْ إِسْبَانْيَا إِلَّا مَضِيقٌ صَغِيرٌ. أَمَّا اللُّغَاتُ، فَأَتَكَلَّمُ الإِنْجْلِيزِيَّةَ بِطَلَاقَةٍ، وَالعَرَبِيَّةَ مَعَ جَدَّتِي الَّتِي تَسْكُنُ مَعَنَا، وَأَفْهَمُ الأَمَازِيغِيَّةَ قَلِيلًا، وَهِيَ لُغَةُ جَدِّي الأَصْلِيَّةُ. أُحِبُّ العَرَبِيَّةَ أَكْثَرَ مِنْ غَيْرِهَا، لِأَنَّهَا تَرْبِطُنِي بِدِينِي وَبِأَهْلِي. وَإِذَا سَنَحَتْ لِيَ الفُرْصَةُ، فَسَأَتَعَلَّمُ الإِسْبَانِيَّةَ، لِأَنَّ جِيرَانَنَا فِي الشَّمَالِ يَتَكَلَّمُونَهَا. وَأَنْتَ، مَا اللُّغَاتُ الَّتِي تَتَكَلَّمُهَا فِي بَيْتِكَ؟</a:t>
@@ -4628,6 +4660,7 @@
                   <a:srgbClr val="1F2A37"/>
                 </a:solidFill>
                 <a:latin typeface="Amiri" pitchFamily="2" charset="-78"/>
+                <a:ea typeface="Amiri" pitchFamily="2" charset="-78"/>
                 <a:cs typeface="Amiri" pitchFamily="2" charset="-78"/>
               </a:rPr>
               <a:t>مَعَ أَطْيَبِ التَّحِيَّاتِ،</a:t>
@@ -4647,6 +4680,7 @@
                   <a:srgbClr val="1F2A37"/>
                 </a:solidFill>
                 <a:latin typeface="Amiri" pitchFamily="2" charset="-78"/>
+                <a:ea typeface="Amiri" pitchFamily="2" charset="-78"/>
                 <a:cs typeface="Amiri" pitchFamily="2" charset="-78"/>
               </a:rPr>
               <a:t>عُمَرُ</a:t>
@@ -4810,11 +4844,12 @@
               <a:buNone/>
             </a:pPr>
             <a:r>
-              <a:rPr lang="en-US" sz="950" b="1" dirty="0">
+              <a:rPr lang="ar-SA" sz="950" b="1" dirty="0">
                 <a:solidFill>
                   <a:srgbClr val="FFFFFF"/>
                 </a:solidFill>
                 <a:latin typeface="Calibri" pitchFamily="34" charset="0"/>
+                <a:ea typeface="Amiri" pitchFamily="2" charset="-78"/>
                 <a:cs typeface="Amiri" pitchFamily="2" charset="-78"/>
               </a:rPr>
               <a:t>غَيْرَ أَنَّ جُذُورَ</a:t>
@@ -4875,11 +4910,12 @@
               <a:buNone/>
             </a:pPr>
             <a:r>
-              <a:rPr lang="en-US" sz="950" b="1" dirty="0">
+              <a:rPr lang="ar-SA" sz="950" b="1" dirty="0">
                 <a:solidFill>
                   <a:srgbClr val="FFFFFF"/>
                 </a:solidFill>
                 <a:latin typeface="Calibri" pitchFamily="34" charset="0"/>
+                <a:ea typeface="Amiri" pitchFamily="2" charset="-78"/>
                 <a:cs typeface="Amiri" pitchFamily="2" charset="-78"/>
               </a:rPr>
               <a:t>الجِنْسِيَّتَيْنِ</a:t>
@@ -4940,11 +4976,12 @@
               <a:buNone/>
             </a:pPr>
             <a:r>
-              <a:rPr lang="en-US" sz="950" b="1" dirty="0">
+              <a:rPr lang="ar-SA" sz="950" b="1" dirty="0">
                 <a:solidFill>
                   <a:srgbClr val="FFFFFF"/>
                 </a:solidFill>
                 <a:latin typeface="Calibri" pitchFamily="34" charset="0"/>
+                <a:ea typeface="Amiri" pitchFamily="2" charset="-78"/>
                 <a:cs typeface="Amiri" pitchFamily="2" charset="-78"/>
               </a:rPr>
               <a:t>لَا يَفْصِلُهُ … إِلَّا</a:t>
@@ -5005,11 +5042,12 @@
               <a:buNone/>
             </a:pPr>
             <a:r>
-              <a:rPr lang="en-US" sz="950" b="1" dirty="0">
+              <a:rPr lang="ar-SA" sz="950" b="1" dirty="0">
                 <a:solidFill>
                   <a:srgbClr val="FFFFFF"/>
                 </a:solidFill>
                 <a:latin typeface="Calibri" pitchFamily="34" charset="0"/>
+                <a:ea typeface="Amiri" pitchFamily="2" charset="-78"/>
                 <a:cs typeface="Amiri" pitchFamily="2" charset="-78"/>
               </a:rPr>
               <a:t>إِذَا سَنَحَتْ … فَسَأَتَعَلَّمُ</a:t>
@@ -5143,6 +5181,7 @@
                   <a:srgbClr val="D4AF37"/>
                 </a:solidFill>
                 <a:latin typeface="Amiri" pitchFamily="2" charset="-78"/>
+                <a:ea typeface="Amiri" pitchFamily="2" charset="-78"/>
                 <a:cs typeface="Amiri" pitchFamily="2" charset="-78"/>
               </a:rPr>
               <a:t>م</a:t>
@@ -5463,6 +5502,7 @@
                   <a:srgbClr val="8A6D1E"/>
                 </a:solidFill>
                 <a:latin typeface="Amiri" pitchFamily="2" charset="-78"/>
+                <a:ea typeface="Amiri" pitchFamily="2" charset="-78"/>
                 <a:cs typeface="Amiri" pitchFamily="2" charset="-78"/>
               </a:rPr>
               <a:t>اخْتَرْ عُنْوَانًا وَاحِدًا</a:t>
@@ -5743,6 +5783,7 @@
                   <a:srgbClr val="1B3B6F"/>
                 </a:solidFill>
                 <a:latin typeface="Amiri" pitchFamily="2" charset="-78"/>
+                <a:ea typeface="Amiri" pitchFamily="2" charset="-78"/>
                 <a:cs typeface="Amiri" pitchFamily="2" charset="-78"/>
               </a:rPr>
               <a:t>بَلَدِي وَلُغَاتِي</a:t>
@@ -5781,6 +5822,7 @@
                   <a:srgbClr val="1B3B6F"/>
                 </a:solidFill>
                 <a:latin typeface="Amiri" pitchFamily="2" charset="-78"/>
+                <a:ea typeface="Amiri" pitchFamily="2" charset="-78"/>
                 <a:cs typeface="Amiri" pitchFamily="2" charset="-78"/>
               </a:rPr>
               <a:t>(أ)</a:t>
@@ -5887,6 +5929,7 @@
                   <a:srgbClr val="1B3B6F"/>
                 </a:solidFill>
                 <a:latin typeface="Amiri" pitchFamily="2" charset="-78"/>
+                <a:ea typeface="Amiri" pitchFamily="2" charset="-78"/>
                 <a:cs typeface="Amiri" pitchFamily="2" charset="-78"/>
               </a:rPr>
               <a:t>أَيْنَ وُلِدْتَ وَمَا جِنْسِيَّتُكَ · بَلَدُ أُسْرَتِكَ: المَوْقِعُ وَالعَاصِمَةُ · اللُّغَاتُ الَّتِي تَتَكَلَّمُهَا وَمَتَى · لُغَةٌ تُرِيدُ أَنْ تَتَعَلَّمَهَا وَلِمَاذَا</a:t>
@@ -6018,6 +6061,7 @@
                   <a:srgbClr val="1B3B6F"/>
                 </a:solidFill>
                 <a:latin typeface="Amiri" pitchFamily="2" charset="-78"/>
+                <a:ea typeface="Amiri" pitchFamily="2" charset="-78"/>
                 <a:cs typeface="Amiri" pitchFamily="2" charset="-78"/>
               </a:rPr>
               <a:t>هَلْ مِنَ المُهِمِّ أَنْ نَتَكَلَّمَ لُغَةَ آبَائِنَا؟</a:t>
@@ -6056,6 +6100,7 @@
                   <a:srgbClr val="1B3B6F"/>
                 </a:solidFill>
                 <a:latin typeface="Amiri" pitchFamily="2" charset="-78"/>
+                <a:ea typeface="Amiri" pitchFamily="2" charset="-78"/>
                 <a:cs typeface="Amiri" pitchFamily="2" charset="-78"/>
               </a:rPr>
               <a:t>(ب)</a:t>
@@ -6159,6 +6204,7 @@
                   <a:srgbClr val="1B3B6F"/>
                 </a:solidFill>
                 <a:latin typeface="Amiri" pitchFamily="2" charset="-78"/>
+                <a:ea typeface="Amiri" pitchFamily="2" charset="-78"/>
                 <a:cs typeface="Amiri" pitchFamily="2" charset="-78"/>
               </a:rPr>
               <a:t>المَوْضُوعُ · الفَوَائِدُ وَالصُّعُوبَاتُ · مِثَالٌ مِنْ تَجْرِبَتِكَ · رَأْيُكَ</a:t>
@@ -6358,6 +6404,7 @@
                   <a:srgbClr val="D4AF37"/>
                 </a:solidFill>
                 <a:latin typeface="Amiri" pitchFamily="2" charset="-78"/>
+                <a:ea typeface="Amiri" pitchFamily="2" charset="-78"/>
                 <a:cs typeface="Amiri" pitchFamily="2" charset="-78"/>
               </a:rPr>
               <a:t>م</a:t>
@@ -6678,6 +6725,7 @@
                   <a:srgbClr val="8A6D1E"/>
                 </a:solidFill>
                 <a:latin typeface="Amiri" pitchFamily="2" charset="-78"/>
+                <a:ea typeface="Amiri" pitchFamily="2" charset="-78"/>
                 <a:cs typeface="Amiri" pitchFamily="2" charset="-78"/>
               </a:rPr>
               <a:t>خُطَّةُ الكِتَابَةِ</a:t>
@@ -7302,6 +7350,7 @@
                   <a:srgbClr val="1B3B6F"/>
                 </a:solidFill>
                 <a:latin typeface="Amiri" pitchFamily="2" charset="-78"/>
+                <a:ea typeface="Amiri" pitchFamily="2" charset="-78"/>
                 <a:cs typeface="Amiri" pitchFamily="2" charset="-78"/>
               </a:rPr>
               <a:t>وُلِدْتُ فِي بِرْمِنْغْهَامَ، وَأَنَا بَرِيطَانِيٌّ.</a:t>
@@ -7401,6 +7450,7 @@
                   <a:srgbClr val="1B3B6F"/>
                 </a:solidFill>
                 <a:latin typeface="Amiri" pitchFamily="2" charset="-78"/>
+                <a:ea typeface="Amiri" pitchFamily="2" charset="-78"/>
                 <a:cs typeface="Amiri" pitchFamily="2" charset="-78"/>
               </a:rPr>
               <a:t>أَتَكَلَّمُ العَرَبِيَّةَ مَعَ جَدَّتِي.</a:t>
@@ -7500,6 +7550,7 @@
                   <a:srgbClr val="1B3B6F"/>
                 </a:solidFill>
                 <a:latin typeface="Amiri" pitchFamily="2" charset="-78"/>
+                <a:ea typeface="Amiri" pitchFamily="2" charset="-78"/>
                 <a:cs typeface="Amiri" pitchFamily="2" charset="-78"/>
               </a:rPr>
               <a:t>سَأَتَعَلَّمُ الإِسْبَانِيَّةَ فِي الجَامِعَةِ.</a:t>
@@ -7661,6 +7712,7 @@
                   <a:srgbClr val="1F2A37"/>
                 </a:solidFill>
                 <a:latin typeface="Amiri" pitchFamily="2" charset="-78"/>
+                <a:ea typeface="Amiri" pitchFamily="2" charset="-78"/>
                 <a:cs typeface="Amiri" pitchFamily="2" charset="-78"/>
               </a:rPr>
               <a:t>أ</a:t>
@@ -7687,6 +7739,7 @@
                   <a:srgbClr val="1F2A37"/>
                 </a:solidFill>
                 <a:latin typeface="Amiri" pitchFamily="2" charset="-78"/>
+                <a:ea typeface="Amiri" pitchFamily="2" charset="-78"/>
                 <a:cs typeface="Amiri" pitchFamily="2" charset="-78"/>
               </a:rPr>
               <a:t>ب</a:t>
@@ -7833,6 +7886,7 @@
                   <a:srgbClr val="D4AF37"/>
                 </a:solidFill>
                 <a:latin typeface="Amiri" pitchFamily="2" charset="-78"/>
+                <a:ea typeface="Amiri" pitchFamily="2" charset="-78"/>
                 <a:cs typeface="Amiri" pitchFamily="2" charset="-78"/>
               </a:rPr>
               <a:t>م</a:t>
@@ -8090,6 +8144,7 @@
                   <a:srgbClr val="8A6D1E"/>
                 </a:solidFill>
                 <a:latin typeface="Amiri" pitchFamily="2" charset="-78"/>
+                <a:ea typeface="Amiri" pitchFamily="2" charset="-78"/>
                 <a:cs typeface="Amiri" pitchFamily="2" charset="-78"/>
               </a:rPr>
               <a:t>أ</a:t>
@@ -8154,6 +8209,7 @@
                   <a:srgbClr val="1B3B6F"/>
                 </a:solidFill>
                 <a:latin typeface="Amiri" pitchFamily="2" charset="-78"/>
+                <a:ea typeface="Amiri" pitchFamily="2" charset="-78"/>
                 <a:cs typeface="Amiri" pitchFamily="2" charset="-78"/>
               </a:rPr>
               <a:t>أ</a:t>
@@ -8205,6 +8261,7 @@
                   <a:srgbClr val="8A6D1E"/>
                 </a:solidFill>
                 <a:latin typeface="Amiri" pitchFamily="2" charset="-78"/>
+                <a:ea typeface="Amiri" pitchFamily="2" charset="-78"/>
                 <a:cs typeface="Amiri" pitchFamily="2" charset="-78"/>
               </a:rPr>
               <a:t>نَمُوذَجُ الإِجَابَةِ</a:t>
@@ -8318,6 +8375,7 @@
                   <a:srgbClr val="1F2A37"/>
                 </a:solidFill>
                 <a:latin typeface="Amiri" pitchFamily="2" charset="-78"/>
+                <a:ea typeface="Amiri" pitchFamily="2" charset="-78"/>
                 <a:cs typeface="Amiri" pitchFamily="2" charset="-78"/>
               </a:rPr>
               <a:t>اسْمِي عُمَرُ، وَأَنَا بَرِيطَانِيٌّ مِنْ أَصْلٍ مَغْرِبِيٍّ. وُلِدْتُ فِي مَدِينَةِ بِرْمِنْغْهَامَ فِي وَسَطِ إِنْجِلْتِرَا، وَأَسْكُنُ فِيهَا مَعَ أُسْرَتِي. أَبِي مَغْرِبِيٌّ، وَأُمِّي مَغْرِبِيَّةٌ، وَجَدَّتِي تَسْكُنُ مَعَنَا.</a:t>
@@ -8337,6 +8395,7 @@
                   <a:srgbClr val="1F2A37"/>
                 </a:solidFill>
                 <a:latin typeface="Amiri" pitchFamily="2" charset="-78"/>
+                <a:ea typeface="Amiri" pitchFamily="2" charset="-78"/>
                 <a:cs typeface="Amiri" pitchFamily="2" charset="-78"/>
               </a:rPr>
               <a:t>يَقَعُ المَغْرِبُ فِي شَمَالِ إِفْرِيقْيَا، قُرْبَ إِسْبَانْيَا. عَاصِمَتُهُ الرِّبَاطُ، وَأَكْبَرُ مَدِينَةٍ فِيهِ الدَّارُ البَيْضَاءُ. فِيهِ جِبَالٌ عَالِيَةٌ وَشَوَاطِئُ جَمِيلَةٌ. نُسَافِرُ إِلَى هُنَاكَ كُلَّ صَيْفٍ لِنَزُورَ أَقَارِبَنَا فِي مَدِينَةِ فَاسَ، وَهِيَ مَدِينَةٌ قَدِيمَةٌ جِدًّا.</a:t>
@@ -8356,6 +8415,7 @@
                   <a:srgbClr val="1F2A37"/>
                 </a:solidFill>
                 <a:latin typeface="Amiri" pitchFamily="2" charset="-78"/>
+                <a:ea typeface="Amiri" pitchFamily="2" charset="-78"/>
                 <a:cs typeface="Amiri" pitchFamily="2" charset="-78"/>
               </a:rPr>
               <a:t>أَتَكَلَّمُ ثَلَاثَ لُغَاتٍ. فِي المَدْرَسَةِ أَتَكَلَّمُ الإِنْجْلِيزِيَّةَ مَعَ أَصْدِقَائِي، وَفِي البَيْتِ أَتَكَلَّمُ العَرَبِيَّةَ مَعَ جَدَّتِي، لِأَنَّهَا لَا تَتَكَلَّمُ الإِنْجْلِيزِيَّةَ. أَدْرُسُ الفَرَنْسِيَّةَ أَيْضًا، وَهِيَ لُغَةٌ مُفِيدَةٌ فِي المَغْرِبِ وَفِي فَرَنْسَا. عِنْدَمَا كُنْتُ صَغِيرًا، كُنْتُ أَتَكَلَّمُ العَرَبِيَّةَ قَلِيلًا فَقَطْ، أَمَّا الآنَ فَأَتَكَلَّمُهَا جَيِّدًا.</a:t>
@@ -8375,6 +8435,7 @@
                   <a:srgbClr val="1F2A37"/>
                 </a:solidFill>
                 <a:latin typeface="Amiri" pitchFamily="2" charset="-78"/>
+                <a:ea typeface="Amiri" pitchFamily="2" charset="-78"/>
                 <a:cs typeface="Amiri" pitchFamily="2" charset="-78"/>
               </a:rPr>
               <a:t>فِي المُسْتَقْبَلِ أُرِيدُ أَنْ أَتَعَلَّمَ الإِسْبَانِيَّةَ، لِأَنَّهَا لُغَةٌ عَالَمِيَّةٌ، وَلِأَنَّ إِسْبَانْيَا قَرِيبَةٌ مِنَ المَغْرِبِ. لِذٰلِكَ سَأَدْرُسُهَا فِي الجَامِعَةِ إِنْ شَاءَ اللّٰهُ.</a:t>
@@ -8538,11 +8599,12 @@
               <a:buNone/>
             </a:pPr>
             <a:r>
-              <a:rPr lang="en-US" sz="950" b="1" dirty="0">
+              <a:rPr lang="ar-SA" sz="950" b="1" dirty="0">
                 <a:solidFill>
                   <a:srgbClr val="FFFFFF"/>
                 </a:solidFill>
                 <a:latin typeface="Calibri" pitchFamily="34" charset="0"/>
+                <a:ea typeface="Amiri" pitchFamily="2" charset="-78"/>
                 <a:cs typeface="Amiri" pitchFamily="2" charset="-78"/>
               </a:rPr>
               <a:t>مِنْ أَصْلٍ مَغْرِبِيٍّ</a:t>
@@ -8603,11 +8665,12 @@
               <a:buNone/>
             </a:pPr>
             <a:r>
-              <a:rPr lang="en-US" sz="950" b="1" dirty="0">
+              <a:rPr lang="ar-SA" sz="950" b="1" dirty="0">
                 <a:solidFill>
                   <a:srgbClr val="FFFFFF"/>
                 </a:solidFill>
                 <a:latin typeface="Calibri" pitchFamily="34" charset="0"/>
+                <a:ea typeface="Amiri" pitchFamily="2" charset="-78"/>
                 <a:cs typeface="Amiri" pitchFamily="2" charset="-78"/>
               </a:rPr>
               <a:t>أَبِي مَغْرِبِيٌّ، وَأُمِّي مَغْرِبِيَّةٌ</a:t>
@@ -8668,11 +8731,12 @@
               <a:buNone/>
             </a:pPr>
             <a:r>
-              <a:rPr lang="en-US" sz="950" b="1" dirty="0">
+              <a:rPr lang="ar-SA" sz="950" b="1" dirty="0">
                 <a:solidFill>
                   <a:srgbClr val="FFFFFF"/>
                 </a:solidFill>
                 <a:latin typeface="Calibri" pitchFamily="34" charset="0"/>
+                <a:ea typeface="Amiri" pitchFamily="2" charset="-78"/>
                 <a:cs typeface="Amiri" pitchFamily="2" charset="-78"/>
               </a:rPr>
               <a:t>يَقَعُ المَغْرِبُ فِي</a:t>
@@ -8733,11 +8797,12 @@
               <a:buNone/>
             </a:pPr>
             <a:r>
-              <a:rPr lang="en-US" sz="950" b="1" dirty="0">
+              <a:rPr lang="ar-SA" sz="950" b="1" dirty="0">
                 <a:solidFill>
                   <a:srgbClr val="FFFFFF"/>
                 </a:solidFill>
                 <a:latin typeface="Calibri" pitchFamily="34" charset="0"/>
+                <a:ea typeface="Amiri" pitchFamily="2" charset="-78"/>
                 <a:cs typeface="Amiri" pitchFamily="2" charset="-78"/>
               </a:rPr>
               <a:t>كُنْتُ أَتَكَلَّمُ</a:t>
@@ -8871,6 +8936,7 @@
                   <a:srgbClr val="D4AF37"/>
                 </a:solidFill>
                 <a:latin typeface="Amiri" pitchFamily="2" charset="-78"/>
+                <a:ea typeface="Amiri" pitchFamily="2" charset="-78"/>
                 <a:cs typeface="Amiri" pitchFamily="2" charset="-78"/>
               </a:rPr>
               <a:t>م</a:t>
@@ -9128,6 +9194,7 @@
                   <a:srgbClr val="8A6D1E"/>
                 </a:solidFill>
                 <a:latin typeface="Amiri" pitchFamily="2" charset="-78"/>
+                <a:ea typeface="Amiri" pitchFamily="2" charset="-78"/>
                 <a:cs typeface="Amiri" pitchFamily="2" charset="-78"/>
               </a:rPr>
               <a:t>أ</a:t>
@@ -9192,6 +9259,7 @@
                   <a:srgbClr val="1B3B6F"/>
                 </a:solidFill>
                 <a:latin typeface="Amiri" pitchFamily="2" charset="-78"/>
+                <a:ea typeface="Amiri" pitchFamily="2" charset="-78"/>
                 <a:cs typeface="Amiri" pitchFamily="2" charset="-78"/>
               </a:rPr>
               <a:t>أ</a:t>
@@ -9243,6 +9311,7 @@
                   <a:srgbClr val="8A6D1E"/>
                 </a:solidFill>
                 <a:latin typeface="Amiri" pitchFamily="2" charset="-78"/>
+                <a:ea typeface="Amiri" pitchFamily="2" charset="-78"/>
                 <a:cs typeface="Amiri" pitchFamily="2" charset="-78"/>
               </a:rPr>
               <a:t>نَمُوذَجُ الإِجَابَةِ</a:t>
@@ -9356,6 +9425,7 @@
                   <a:srgbClr val="1F2A37"/>
                 </a:solidFill>
                 <a:latin typeface="Amiri" pitchFamily="2" charset="-78"/>
+                <a:ea typeface="Amiri" pitchFamily="2" charset="-78"/>
                 <a:cs typeface="Amiri" pitchFamily="2" charset="-78"/>
               </a:rPr>
               <a:t>يَسْأَلُنِي النَّاسُ أَحْيَانًا: "مِنْ أَيْنَ أَنْتَ؟"، فَأَبْتَسِمُ، لِأَنَّ الجَوَابَ عِنْدِي لَيْسَ كَلِمَةً وَاحِدَةً. فَأَنَا وُلِدْتُ فِي بِرْمِنْغْهَامَ، وَأَحْمِلُ الجِنْسِيَّةَ البَرِيطَانِيَّةَ، غَيْرَ أَنَّ جُذُورِي تَمْتَدُّ إِلَى قَرْيَةٍ صَغِيرَةٍ فِي جِبَالِ الأَطْلَسِ المَغْرِبِيَّةِ. فَأَبِي مَغْرِبِيٌّ أَمَازِيغِيٌّ، وَأُمِّي مَغْرِبِيَّةٌ عَرَبِيَّةٌ، وَأَنَا خَلِيطٌ جَمِيلٌ مِنْهُمَا.</a:t>
@@ -9375,6 +9445,7 @@
                   <a:srgbClr val="1F2A37"/>
                 </a:solidFill>
                 <a:latin typeface="Amiri" pitchFamily="2" charset="-78"/>
+                <a:ea typeface="Amiri" pitchFamily="2" charset="-78"/>
                 <a:cs typeface="Amiri" pitchFamily="2" charset="-78"/>
               </a:rPr>
               <a:t>يَقَعُ المَغْرِبُ فِي أَقْصَى شَمَالِ غَرْبِ إِفْرِيقْيَا، بَيْنَ البَحْرِ الأَبْيَضِ المُتَوَسِّطِ وَالمُحِيطِ الأَطْلَسِيِّ، وَهُوَ بَلَدٌ تَلْتَقِي فِيهِ الثَّقَافَاتُ العَرَبِيَّةُ وَالأَمَازِيغِيَّةُ وَالإِفْرِيقِيَّةُ وَالأُورُوبِّيَّةُ. وَعَاصِمَتُهُ الرِّبَاطُ، أَمَّا أَكْبَرُ مُدُنِهِ فَالدَّارُ البَيْضَاءُ.</a:t>
@@ -9394,6 +9465,7 @@
                   <a:srgbClr val="1F2A37"/>
                 </a:solidFill>
                 <a:latin typeface="Amiri" pitchFamily="2" charset="-78"/>
+                <a:ea typeface="Amiri" pitchFamily="2" charset="-78"/>
                 <a:cs typeface="Amiri" pitchFamily="2" charset="-78"/>
               </a:rPr>
               <a:t>وَلَعَلَّ أَجْمَلَ مَا وَرِثْتُهُ مِنْ هٰذَا التَّنَوُّعِ هُوَ اللُّغَاتُ؛ فَأَنَا أُفَكِّرُ بِالإِنْجْلِيزِيَّةِ، وَأُصَلِّي وَأَتَحَدَّثُ مَعَ جَدَّتِي بِالعَرَبِيَّةِ، وَأَتَعَلَّمُ الفَرَنْسِيَّةَ فِي المَدْرَسَةِ. وَمَعَ أَنَّنِي كُنْتُ أَخْجَلُ مِنْ لَهْجَتِي المَغْرِبِيَّةِ فِي صِغَرِي، فَإِنَّنِي أَعْتَزُّ بِهَا اليَوْمَ، وَأَسْتَخْدِمُهَا بِفَخْرٍ كُلَّمَا زُرْتُ أَقَارِبِي.</a:t>
@@ -9413,6 +9485,7 @@
                   <a:srgbClr val="1F2A37"/>
                 </a:solidFill>
                 <a:latin typeface="Amiri" pitchFamily="2" charset="-78"/>
+                <a:ea typeface="Amiri" pitchFamily="2" charset="-78"/>
                 <a:cs typeface="Amiri" pitchFamily="2" charset="-78"/>
               </a:rPr>
               <a:t>أَمَّا فِي المُسْتَقْبَلِ، فَأَطْمَحُ إِلَى تَعَلُّمِ الإِسْبَانِيَّةِ، لِكَيْ أَعْمَلَ مُتَرْجِمًا بَيْنَ ضِفَّتَيِ المُتَوَسِّطِ. وَلَوْ سَأَلَنِي أَحَدٌ اليَوْمَ: "مِنْ أَيْنَ أَنْتَ؟"، لَقُلْتُ: "مِنْ بِرْمِنْغْهَامَ وَمِنَ الأَطْلَسِ مَعًا".</a:t>
@@ -9511,11 +9584,12 @@
               <a:buNone/>
             </a:pPr>
             <a:r>
-              <a:rPr lang="en-US" sz="950" b="1" dirty="0">
+              <a:rPr lang="ar-SA" sz="950" b="1" dirty="0">
                 <a:solidFill>
                   <a:srgbClr val="FFFFFF"/>
                 </a:solidFill>
                 <a:latin typeface="Calibri" pitchFamily="34" charset="0"/>
+                <a:ea typeface="Amiri" pitchFamily="2" charset="-78"/>
                 <a:cs typeface="Amiri" pitchFamily="2" charset="-78"/>
               </a:rPr>
               <a:t>لَيْسَ كَلِمَةً وَاحِدَةً</a:t>
@@ -9576,11 +9650,12 @@
               <a:buNone/>
             </a:pPr>
             <a:r>
-              <a:rPr lang="en-US" sz="950" b="1" dirty="0">
+              <a:rPr lang="ar-SA" sz="950" b="1" dirty="0">
                 <a:solidFill>
                   <a:srgbClr val="FFFFFF"/>
                 </a:solidFill>
                 <a:latin typeface="Calibri" pitchFamily="34" charset="0"/>
+                <a:ea typeface="Amiri" pitchFamily="2" charset="-78"/>
                 <a:cs typeface="Amiri" pitchFamily="2" charset="-78"/>
               </a:rPr>
               <a:t>تَلْتَقِي فِيهِ الثَّقَافَاتُ</a:t>
@@ -9641,11 +9716,12 @@
               <a:buNone/>
             </a:pPr>
             <a:r>
-              <a:rPr lang="en-US" sz="950" b="1" dirty="0">
+              <a:rPr lang="ar-SA" sz="950" b="1" dirty="0">
                 <a:solidFill>
                   <a:srgbClr val="FFFFFF"/>
                 </a:solidFill>
                 <a:latin typeface="Calibri" pitchFamily="34" charset="0"/>
+                <a:ea typeface="Amiri" pitchFamily="2" charset="-78"/>
                 <a:cs typeface="Amiri" pitchFamily="2" charset="-78"/>
               </a:rPr>
               <a:t>مَعَ أَنَّنِي … فَإِنَّنِي</a:t>
@@ -9706,11 +9782,12 @@
               <a:buNone/>
             </a:pPr>
             <a:r>
-              <a:rPr lang="en-US" sz="950" b="1" dirty="0">
+              <a:rPr lang="ar-SA" sz="950" b="1" dirty="0">
                 <a:solidFill>
                   <a:srgbClr val="FFFFFF"/>
                 </a:solidFill>
                 <a:latin typeface="Calibri" pitchFamily="34" charset="0"/>
+                <a:ea typeface="Amiri" pitchFamily="2" charset="-78"/>
                 <a:cs typeface="Amiri" pitchFamily="2" charset="-78"/>
               </a:rPr>
               <a:t>لَوْ سَأَلَنِي … لَقُلْتُ</a:t>
@@ -9844,6 +9921,7 @@
                   <a:srgbClr val="D4AF37"/>
                 </a:solidFill>
                 <a:latin typeface="Amiri" pitchFamily="2" charset="-78"/>
+                <a:ea typeface="Amiri" pitchFamily="2" charset="-78"/>
                 <a:cs typeface="Amiri" pitchFamily="2" charset="-78"/>
               </a:rPr>
               <a:t>م</a:t>
@@ -10101,6 +10179,7 @@
                   <a:srgbClr val="8A6D1E"/>
                 </a:solidFill>
                 <a:latin typeface="Amiri" pitchFamily="2" charset="-78"/>
+                <a:ea typeface="Amiri" pitchFamily="2" charset="-78"/>
                 <a:cs typeface="Amiri" pitchFamily="2" charset="-78"/>
               </a:rPr>
               <a:t>ب</a:t>
@@ -10165,6 +10244,7 @@
                   <a:srgbClr val="1B3B6F"/>
                 </a:solidFill>
                 <a:latin typeface="Amiri" pitchFamily="2" charset="-78"/>
+                <a:ea typeface="Amiri" pitchFamily="2" charset="-78"/>
                 <a:cs typeface="Amiri" pitchFamily="2" charset="-78"/>
               </a:rPr>
               <a:t>ب</a:t>
@@ -10216,6 +10296,7 @@
                   <a:srgbClr val="8A6D1E"/>
                 </a:solidFill>
                 <a:latin typeface="Amiri" pitchFamily="2" charset="-78"/>
+                <a:ea typeface="Amiri" pitchFamily="2" charset="-78"/>
                 <a:cs typeface="Amiri" pitchFamily="2" charset="-78"/>
               </a:rPr>
               <a:t>نَمُوذَجُ الإِجَابَةِ</a:t>
@@ -10329,6 +10410,7 @@
                   <a:srgbClr val="1F2A37"/>
                 </a:solidFill>
                 <a:latin typeface="Amiri" pitchFamily="2" charset="-78"/>
+                <a:ea typeface="Amiri" pitchFamily="2" charset="-78"/>
                 <a:cs typeface="Amiri" pitchFamily="2" charset="-78"/>
               </a:rPr>
               <a:t>فِي مُدُنِ العَالَمِ الكُبْرَى، يَنْشَأُ مَلَايِينُ الأَطْفَالِ فِي بُيُوتٍ تَتَكَلَّمُ لُغَةً، وَمَدَارِسَ تَتَكَلَّمُ لُغَةً أُخْرَى. فَهَلْ مِنَ المُهِمِّ أَنْ يَحْتَفِظُوا بِلُغَةِ آبَائِهِمْ، أَمْ يَكْفِي أَنْ يُتْقِنُوا لُغَةَ البَلَدِ الَّذِي يَعِيشُونَ فِيهِ؟</a:t>
@@ -10348,6 +10430,7 @@
                   <a:srgbClr val="1F2A37"/>
                 </a:solidFill>
                 <a:latin typeface="Amiri" pitchFamily="2" charset="-78"/>
+                <a:ea typeface="Amiri" pitchFamily="2" charset="-78"/>
                 <a:cs typeface="Amiri" pitchFamily="2" charset="-78"/>
               </a:rPr>
               <a:t>مِنْ نَاحِيَةٍ، تَرْبِطُ لُغَةُ الآبَاءِ الطِّفْلَ بِأَجْدَادِهِ وَدِينِهِ وَتَارِيخِهِ، كَمَا أَنَّ تَعَلُّمَ لُغَتَيْنِ مُنْذُ الصِّغَرِ يُقَوِّي الذَّاكِرَةَ وَالتَّرْكِيزَ وَيَفْتَحُ فُرَصَ عَمَلٍ أَكْثَرَ. وَمِنْ نَاحِيَةٍ أُخْرَى، يَشْعُرُ بَعْضُ الأَطْفَالِ بِضَغْطٍ كَبِيرٍ، لِأَنَّهُمْ يَدْرُسُونَ طُولَ الأُسْبُوعِ، ثُمَّ يَذْهَبُونَ إِلَى دُرُوسٍ إِضَافِيَّةٍ يَوْمَ السَّبْتِ.</a:t>
@@ -10367,6 +10450,7 @@
                   <a:srgbClr val="1F2A37"/>
                 </a:solidFill>
                 <a:latin typeface="Amiri" pitchFamily="2" charset="-78"/>
+                <a:ea typeface="Amiri" pitchFamily="2" charset="-78"/>
                 <a:cs typeface="Amiri" pitchFamily="2" charset="-78"/>
               </a:rPr>
               <a:t>وَقَدْ عِشْتُ هٰذِهِ التَّجْرِبَةَ بِنَفْسِي؛ فَكُنْتُ أَكْرَهُ دُرُوسَ العَرَبِيَّةِ فِي عُطْلَةِ نِهَايَةِ الأُسْبُوعِ، إِلَى أَنْ زُرْتُ المَغْرِبَ، وَاسْتَطَعْتُ لِأَوَّلِ مَرَّةٍ أَنْ أَتَحَدَّثَ مَعَ جَدِّي دُونَ مُتَرْجِمٍ، فَبَكَى مِنَ الفَرَحِ وَعَانَقَنِي طَوِيلًا. عِنْدَئِذٍ فَهِمْتُ قِيمَةَ تِلْكَ السَّاعَاتِ الطَّوِيلَةِ.</a:t>
@@ -10386,6 +10470,7 @@
                   <a:srgbClr val="1F2A37"/>
                 </a:solidFill>
                 <a:latin typeface="Amiri" pitchFamily="2" charset="-78"/>
+                <a:ea typeface="Amiri" pitchFamily="2" charset="-78"/>
                 <a:cs typeface="Amiri" pitchFamily="2" charset="-78"/>
               </a:rPr>
               <a:t>أَرَى أَنَّ لُغَةَ الآبَاءِ كَنْزٌ يَجِبُ أَلَّا نَفْقِدَهُ، غَيْرَ أَنَّ الأُسَرَ يَنْبَغِي أَنْ تُعَلِّمَهَا بِالحُبِّ لَا بِالإِجْبَارِ. فَإِذَا ارْتَبَطَتِ اللُّغَةُ بِالقِصَصِ وَالرِّحْلَاتِ وَالأَلْعَابِ، فَسَيُحِبُّهَا الأَطْفَالُ وَيَحْفَظُونَهَا.</a:t>
@@ -10484,11 +10569,12 @@
               <a:buNone/>
             </a:pPr>
             <a:r>
-              <a:rPr lang="en-US" sz="950" b="1" dirty="0">
+              <a:rPr lang="ar-SA" sz="950" b="1" dirty="0">
                 <a:solidFill>
                   <a:srgbClr val="FFFFFF"/>
                 </a:solidFill>
                 <a:latin typeface="Calibri" pitchFamily="34" charset="0"/>
+                <a:ea typeface="Amiri" pitchFamily="2" charset="-78"/>
                 <a:cs typeface="Amiri" pitchFamily="2" charset="-78"/>
               </a:rPr>
               <a:t>هَلْ … أَمْ يَكْفِي</a:t>
@@ -10549,11 +10635,12 @@
               <a:buNone/>
             </a:pPr>
             <a:r>
-              <a:rPr lang="en-US" sz="950" b="1" dirty="0">
+              <a:rPr lang="ar-SA" sz="950" b="1" dirty="0">
                 <a:solidFill>
                   <a:srgbClr val="FFFFFF"/>
                 </a:solidFill>
                 <a:latin typeface="Calibri" pitchFamily="34" charset="0"/>
+                <a:ea typeface="Amiri" pitchFamily="2" charset="-78"/>
                 <a:cs typeface="Amiri" pitchFamily="2" charset="-78"/>
               </a:rPr>
               <a:t>كَمَا أَنَّ</a:t>
@@ -10614,11 +10701,12 @@
               <a:buNone/>
             </a:pPr>
             <a:r>
-              <a:rPr lang="en-US" sz="950" b="1" dirty="0">
+              <a:rPr lang="ar-SA" sz="950" b="1" dirty="0">
                 <a:solidFill>
                   <a:srgbClr val="FFFFFF"/>
                 </a:solidFill>
                 <a:latin typeface="Calibri" pitchFamily="34" charset="0"/>
+                <a:ea typeface="Amiri" pitchFamily="2" charset="-78"/>
                 <a:cs typeface="Amiri" pitchFamily="2" charset="-78"/>
               </a:rPr>
               <a:t>إِلَى أَنْ زُرْتُ</a:t>
@@ -10679,11 +10767,12 @@
               <a:buNone/>
             </a:pPr>
             <a:r>
-              <a:rPr lang="en-US" sz="950" b="1" dirty="0">
+              <a:rPr lang="ar-SA" sz="950" b="1" dirty="0">
                 <a:solidFill>
                   <a:srgbClr val="FFFFFF"/>
                 </a:solidFill>
                 <a:latin typeface="Calibri" pitchFamily="34" charset="0"/>
+                <a:ea typeface="Amiri" pitchFamily="2" charset="-78"/>
                 <a:cs typeface="Amiri" pitchFamily="2" charset="-78"/>
               </a:rPr>
               <a:t>إِذَا ارْتَبَطَتْ … فَسَيُحِبُّهَا</a:t>
@@ -10817,6 +10906,7 @@
                   <a:srgbClr val="D4AF37"/>
                 </a:solidFill>
                 <a:latin typeface="Amiri" pitchFamily="2" charset="-78"/>
+                <a:ea typeface="Amiri" pitchFamily="2" charset="-78"/>
                 <a:cs typeface="Amiri" pitchFamily="2" charset="-78"/>
               </a:rPr>
               <a:t>م</a:t>
@@ -11137,6 +11227,7 @@
                   <a:srgbClr val="8A6D1E"/>
                 </a:solidFill>
                 <a:latin typeface="Amiri" pitchFamily="2" charset="-78"/>
+                <a:ea typeface="Amiri" pitchFamily="2" charset="-78"/>
                 <a:cs typeface="Amiri" pitchFamily="2" charset="-78"/>
               </a:rPr>
               <a:t>قَيِّمْ عَمَلَكَ</a:t>
@@ -12381,6 +12472,7 @@
                   <a:srgbClr val="FFFFFF"/>
                 </a:solidFill>
                 <a:latin typeface="Amiri" pitchFamily="2" charset="-78"/>
+                <a:ea typeface="Amiri" pitchFamily="2" charset="-78"/>
                 <a:cs typeface="Amiri" pitchFamily="2" charset="-78"/>
               </a:rPr>
               <a:t>أَحْسَنْتُمْ! إِلَى اللِّقَاءِ</a:t>
@@ -12533,6 +12625,7 @@
                   <a:srgbClr val="D4AF37"/>
                 </a:solidFill>
                 <a:latin typeface="Amiri" pitchFamily="2" charset="-78"/>
+                <a:ea typeface="Amiri" pitchFamily="2" charset="-78"/>
                 <a:cs typeface="Amiri" pitchFamily="2" charset="-78"/>
               </a:rPr>
               <a:t>وَرْشَةُ التَّدْرِيبِ</a:t>
@@ -12666,6 +12759,7 @@
                   <a:srgbClr val="D4AF37"/>
                 </a:solidFill>
                 <a:latin typeface="Amiri" pitchFamily="2" charset="-78"/>
+                <a:ea typeface="Amiri" pitchFamily="2" charset="-78"/>
                 <a:cs typeface="Amiri" pitchFamily="2" charset="-78"/>
               </a:rPr>
               <a:t>م</a:t>
@@ -12986,6 +13080,7 @@
                   <a:srgbClr val="8A6D1E"/>
                 </a:solidFill>
                 <a:latin typeface="Amiri" pitchFamily="2" charset="-78"/>
+                <a:ea typeface="Amiri" pitchFamily="2" charset="-78"/>
                 <a:cs typeface="Amiri" pitchFamily="2" charset="-78"/>
               </a:rPr>
               <a:t>آدَابُ الصَّفِّ</a:t>
@@ -14517,6 +14612,7 @@
                   <a:srgbClr val="D4AF37"/>
                 </a:solidFill>
                 <a:latin typeface="Amiri" pitchFamily="2" charset="-78"/>
+                <a:ea typeface="Amiri" pitchFamily="2" charset="-78"/>
                 <a:cs typeface="Amiri" pitchFamily="2" charset="-78"/>
               </a:rPr>
               <a:t>م</a:t>
@@ -14837,6 +14933,7 @@
                   <a:srgbClr val="8A6D1E"/>
                 </a:solidFill>
                 <a:latin typeface="Amiri" pitchFamily="2" charset="-78"/>
+                <a:ea typeface="Amiri" pitchFamily="2" charset="-78"/>
                 <a:cs typeface="Amiri" pitchFamily="2" charset="-78"/>
               </a:rPr>
               <a:t>خَرِيطَةُ الوَرْشَةِ</a:t>
@@ -15151,6 +15248,7 @@
                   <a:srgbClr val="1B3B6F"/>
                 </a:solidFill>
                 <a:latin typeface="Amiri" pitchFamily="2" charset="-78"/>
+                <a:ea typeface="Amiri" pitchFamily="2" charset="-78"/>
                 <a:cs typeface="Amiri" pitchFamily="2" charset="-78"/>
               </a:rPr>
               <a:t>كَيْفَ</a:t>
@@ -15427,6 +15525,7 @@
                   <a:srgbClr val="1E6B52"/>
                 </a:solidFill>
                 <a:latin typeface="Amiri" pitchFamily="2" charset="-78"/>
+                <a:ea typeface="Amiri" pitchFamily="2" charset="-78"/>
                 <a:cs typeface="Amiri" pitchFamily="2" charset="-78"/>
               </a:rPr>
               <a:t>الاسْتِمَارَةُ</a:t>
@@ -15703,6 +15802,7 @@
                   <a:srgbClr val="1E6B52"/>
                 </a:solidFill>
                 <a:latin typeface="Amiri" pitchFamily="2" charset="-78"/>
+                <a:ea typeface="Amiri" pitchFamily="2" charset="-78"/>
                 <a:cs typeface="Amiri" pitchFamily="2" charset="-78"/>
               </a:rPr>
               <a:t>الرِّسَالَةُ</a:t>
@@ -15979,6 +16079,7 @@
                   <a:srgbClr val="1E6B52"/>
                 </a:solidFill>
                 <a:latin typeface="Amiri" pitchFamily="2" charset="-78"/>
+                <a:ea typeface="Amiri" pitchFamily="2" charset="-78"/>
                 <a:cs typeface="Amiri" pitchFamily="2" charset="-78"/>
               </a:rPr>
               <a:t>المَقَالُ</a:t>
@@ -16255,6 +16356,7 @@
                   <a:srgbClr val="8A6D1E"/>
                 </a:solidFill>
                 <a:latin typeface="Amiri" pitchFamily="2" charset="-78"/>
+                <a:ea typeface="Amiri" pitchFamily="2" charset="-78"/>
                 <a:cs typeface="Amiri" pitchFamily="2" charset="-78"/>
               </a:rPr>
               <a:t>قَيِّمْ</a:t>
@@ -16498,6 +16600,7 @@
                   <a:srgbClr val="D4AF37"/>
                 </a:solidFill>
                 <a:latin typeface="Amiri" pitchFamily="2" charset="-78"/>
+                <a:ea typeface="Amiri" pitchFamily="2" charset="-78"/>
                 <a:cs typeface="Amiri" pitchFamily="2" charset="-78"/>
               </a:rPr>
               <a:t>م</a:t>
@@ -16818,6 +16921,7 @@
                   <a:srgbClr val="8A6D1E"/>
                 </a:solidFill>
                 <a:latin typeface="Amiri" pitchFamily="2" charset="-78"/>
+                <a:ea typeface="Amiri" pitchFamily="2" charset="-78"/>
                 <a:cs typeface="Amiri" pitchFamily="2" charset="-78"/>
               </a:rPr>
               <a:t>امْتِحَانُ الكِتَابَةِ</a:t>
@@ -17345,6 +17449,7 @@
                   <a:srgbClr val="1F2A37"/>
                 </a:solidFill>
                 <a:latin typeface="Amiri" pitchFamily="2" charset="-78"/>
+                <a:ea typeface="Amiri" pitchFamily="2" charset="-78"/>
                 <a:cs typeface="Amiri" pitchFamily="2" charset="-78"/>
               </a:rPr>
               <a:t>ـِيٌّ</a:t>
@@ -17371,6 +17476,7 @@
                   <a:srgbClr val="1F2A37"/>
                 </a:solidFill>
                 <a:latin typeface="Amiri" pitchFamily="2" charset="-78"/>
+                <a:ea typeface="Amiri" pitchFamily="2" charset="-78"/>
                 <a:cs typeface="Amiri" pitchFamily="2" charset="-78"/>
               </a:rPr>
               <a:t>ـِيَّةٌ</a:t>
@@ -17397,6 +17503,7 @@
                   <a:srgbClr val="1F2A37"/>
                 </a:solidFill>
                 <a:latin typeface="Amiri" pitchFamily="2" charset="-78"/>
+                <a:ea typeface="Amiri" pitchFamily="2" charset="-78"/>
                 <a:cs typeface="Amiri" pitchFamily="2" charset="-78"/>
               </a:rPr>
               <a:t>ـِيُّونَ</a:t>
@@ -17520,6 +17627,7 @@
                   <a:srgbClr val="1B3B6F"/>
                 </a:solidFill>
                 <a:latin typeface="Amiri" pitchFamily="2" charset="-78"/>
+                <a:ea typeface="Amiri" pitchFamily="2" charset="-78"/>
                 <a:cs typeface="Amiri" pitchFamily="2" charset="-78"/>
               </a:rPr>
               <a:t>أَنَا بَرِيطَانِيٌّ، لٰكِنَّ أَصْلَ أُسْرَتِي مِنَ المَغْرِبِ</a:t>
@@ -17619,6 +17727,7 @@
                   <a:srgbClr val="1B3B6F"/>
                 </a:solidFill>
                 <a:latin typeface="Amiri" pitchFamily="2" charset="-78"/>
+                <a:ea typeface="Amiri" pitchFamily="2" charset="-78"/>
                 <a:cs typeface="Amiri" pitchFamily="2" charset="-78"/>
               </a:rPr>
               <a:t>يَقَعُ المَغْرِبُ فِي شَمَالِ إِفْرِيقْيَا، قُرْبَ إِسْبَانْيَا</a:t>
@@ -17718,6 +17827,7 @@
                   <a:srgbClr val="1B3B6F"/>
                 </a:solidFill>
                 <a:latin typeface="Amiri" pitchFamily="2" charset="-78"/>
+                <a:ea typeface="Amiri" pitchFamily="2" charset="-78"/>
                 <a:cs typeface="Amiri" pitchFamily="2" charset="-78"/>
               </a:rPr>
               <a:t>أَتَكَلَّمُ العَرَبِيَّةَ مَعَ جَدَّتِي، لِأَنَّهَا …</a:t>
@@ -17889,6 +17999,7 @@
                   <a:srgbClr val="D4AF37"/>
                 </a:solidFill>
                 <a:latin typeface="Amiri" pitchFamily="2" charset="-78"/>
+                <a:ea typeface="Amiri" pitchFamily="2" charset="-78"/>
                 <a:cs typeface="Amiri" pitchFamily="2" charset="-78"/>
               </a:rPr>
               <a:t>م</a:t>
@@ -18209,6 +18320,7 @@
                   <a:srgbClr val="8A6D1E"/>
                 </a:solidFill>
                 <a:latin typeface="Amiri" pitchFamily="2" charset="-78"/>
+                <a:ea typeface="Amiri" pitchFamily="2" charset="-78"/>
                 <a:cs typeface="Amiri" pitchFamily="2" charset="-78"/>
               </a:rPr>
               <a:t>اسْتِمَارَةُ التَّسْجِيلِ فِي بَرْنَامَجِ التَّبَادُلِ الدُّوَلِيِّ</a:t>
@@ -18565,6 +18677,7 @@
                   <a:srgbClr val="1B3B6F"/>
                 </a:solidFill>
                 <a:latin typeface="Amiri" pitchFamily="2" charset="-78"/>
+                <a:ea typeface="Amiri" pitchFamily="2" charset="-78"/>
                 <a:cs typeface="Amiri" pitchFamily="2" charset="-78"/>
               </a:rPr>
               <a:t>الاسْمُ</a:t>
@@ -18809,6 +18922,7 @@
                   <a:srgbClr val="1B3B6F"/>
                 </a:solidFill>
                 <a:latin typeface="Amiri" pitchFamily="2" charset="-78"/>
+                <a:ea typeface="Amiri" pitchFamily="2" charset="-78"/>
                 <a:cs typeface="Amiri" pitchFamily="2" charset="-78"/>
               </a:rPr>
               <a:t>الجِنْسِيَّةُ</a:t>
@@ -19053,6 +19167,7 @@
                   <a:srgbClr val="1B3B6F"/>
                 </a:solidFill>
                 <a:latin typeface="Amiri" pitchFamily="2" charset="-78"/>
+                <a:ea typeface="Amiri" pitchFamily="2" charset="-78"/>
                 <a:cs typeface="Amiri" pitchFamily="2" charset="-78"/>
               </a:rPr>
               <a:t>مَكَانُ الوِلَادَةِ</a:t>
@@ -19297,6 +19412,7 @@
                   <a:srgbClr val="1B3B6F"/>
                 </a:solidFill>
                 <a:latin typeface="Amiri" pitchFamily="2" charset="-78"/>
+                <a:ea typeface="Amiri" pitchFamily="2" charset="-78"/>
                 <a:cs typeface="Amiri" pitchFamily="2" charset="-78"/>
               </a:rPr>
               <a:t>أَصْلُ الأُسْرَةِ</a:t>
@@ -19541,6 +19657,7 @@
                   <a:srgbClr val="1B3B6F"/>
                 </a:solidFill>
                 <a:latin typeface="Amiri" pitchFamily="2" charset="-78"/>
+                <a:ea typeface="Amiri" pitchFamily="2" charset="-78"/>
                 <a:cs typeface="Amiri" pitchFamily="2" charset="-78"/>
               </a:rPr>
               <a:t>اللُّغَةُ الأُمُّ</a:t>
@@ -19785,6 +19902,7 @@
                   <a:srgbClr val="1B3B6F"/>
                 </a:solidFill>
                 <a:latin typeface="Amiri" pitchFamily="2" charset="-78"/>
+                <a:ea typeface="Amiri" pitchFamily="2" charset="-78"/>
                 <a:cs typeface="Amiri" pitchFamily="2" charset="-78"/>
               </a:rPr>
               <a:t>لُغَاتٌ أُخْرَى</a:t>
@@ -20029,6 +20147,7 @@
                   <a:srgbClr val="1B3B6F"/>
                 </a:solidFill>
                 <a:latin typeface="Amiri" pitchFamily="2" charset="-78"/>
+                <a:ea typeface="Amiri" pitchFamily="2" charset="-78"/>
                 <a:cs typeface="Amiri" pitchFamily="2" charset="-78"/>
               </a:rPr>
               <a:t>البَلَدُ المَطْلُوبُ</a:t>
@@ -20208,6 +20327,7 @@
                   <a:srgbClr val="1B3B6F"/>
                 </a:solidFill>
                 <a:latin typeface="Amiri" pitchFamily="2" charset="-78"/>
+                <a:ea typeface="Amiri" pitchFamily="2" charset="-78"/>
                 <a:cs typeface="Amiri" pitchFamily="2" charset="-78"/>
               </a:rPr>
               <a:t>جُمْلَةٌ: لِمَاذَا هٰذَا البَلَدُ؟</a:t>
@@ -20417,6 +20537,7 @@
                   <a:srgbClr val="D4AF37"/>
                 </a:solidFill>
                 <a:latin typeface="Amiri" pitchFamily="2" charset="-78"/>
+                <a:ea typeface="Amiri" pitchFamily="2" charset="-78"/>
                 <a:cs typeface="Amiri" pitchFamily="2" charset="-78"/>
               </a:rPr>
               <a:t>م</a:t>
@@ -20737,6 +20858,7 @@
                   <a:srgbClr val="8A6D1E"/>
                 </a:solidFill>
                 <a:latin typeface="Amiri" pitchFamily="2" charset="-78"/>
+                <a:ea typeface="Amiri" pitchFamily="2" charset="-78"/>
                 <a:cs typeface="Amiri" pitchFamily="2" charset="-78"/>
               </a:rPr>
               <a:t>نَمُوذَجُ الإِجَابَةِ</a:t>
@@ -21055,6 +21177,7 @@
                   <a:srgbClr val="1B3B6F"/>
                 </a:solidFill>
                 <a:latin typeface="Amiri" pitchFamily="2" charset="-78"/>
+                <a:ea typeface="Amiri" pitchFamily="2" charset="-78"/>
                 <a:cs typeface="Amiri" pitchFamily="2" charset="-78"/>
               </a:rPr>
               <a:t>عُمَرُ بِنْ عَلِيٍّ</a:t>
@@ -21093,6 +21216,7 @@
                   <a:srgbClr val="1B3B6F"/>
                 </a:solidFill>
                 <a:latin typeface="Amiri" pitchFamily="2" charset="-78"/>
+                <a:ea typeface="Amiri" pitchFamily="2" charset="-78"/>
                 <a:cs typeface="Amiri" pitchFamily="2" charset="-78"/>
               </a:rPr>
               <a:t>الاسْمُ</a:t>
@@ -21234,6 +21358,7 @@
                   <a:srgbClr val="1B3B6F"/>
                 </a:solidFill>
                 <a:latin typeface="Amiri" pitchFamily="2" charset="-78"/>
+                <a:ea typeface="Amiri" pitchFamily="2" charset="-78"/>
                 <a:cs typeface="Amiri" pitchFamily="2" charset="-78"/>
               </a:rPr>
               <a:t>بَرِيطَانِيٌّ</a:t>
@@ -21272,6 +21397,7 @@
                   <a:srgbClr val="1B3B6F"/>
                 </a:solidFill>
                 <a:latin typeface="Amiri" pitchFamily="2" charset="-78"/>
+                <a:ea typeface="Amiri" pitchFamily="2" charset="-78"/>
                 <a:cs typeface="Amiri" pitchFamily="2" charset="-78"/>
               </a:rPr>
               <a:t>الجِنْسِيَّةُ</a:t>
@@ -21413,6 +21539,7 @@
                   <a:srgbClr val="1B3B6F"/>
                 </a:solidFill>
                 <a:latin typeface="Amiri" pitchFamily="2" charset="-78"/>
+                <a:ea typeface="Amiri" pitchFamily="2" charset="-78"/>
                 <a:cs typeface="Amiri" pitchFamily="2" charset="-78"/>
               </a:rPr>
               <a:t>بِرْمِنْغْهَامُ</a:t>
@@ -21451,6 +21578,7 @@
                   <a:srgbClr val="1B3B6F"/>
                 </a:solidFill>
                 <a:latin typeface="Amiri" pitchFamily="2" charset="-78"/>
+                <a:ea typeface="Amiri" pitchFamily="2" charset="-78"/>
                 <a:cs typeface="Amiri" pitchFamily="2" charset="-78"/>
               </a:rPr>
               <a:t>مَكَانُ الوِلَادَةِ</a:t>
@@ -21592,6 +21720,7 @@
                   <a:srgbClr val="1B3B6F"/>
                 </a:solidFill>
                 <a:latin typeface="Amiri" pitchFamily="2" charset="-78"/>
+                <a:ea typeface="Amiri" pitchFamily="2" charset="-78"/>
                 <a:cs typeface="Amiri" pitchFamily="2" charset="-78"/>
               </a:rPr>
               <a:t>المَغْرِبُ</a:t>
@@ -21630,6 +21759,7 @@
                   <a:srgbClr val="1B3B6F"/>
                 </a:solidFill>
                 <a:latin typeface="Amiri" pitchFamily="2" charset="-78"/>
+                <a:ea typeface="Amiri" pitchFamily="2" charset="-78"/>
                 <a:cs typeface="Amiri" pitchFamily="2" charset="-78"/>
               </a:rPr>
               <a:t>أَصْلُ الأُسْرَةِ</a:t>
@@ -21771,6 +21901,7 @@
                   <a:srgbClr val="1B3B6F"/>
                 </a:solidFill>
                 <a:latin typeface="Amiri" pitchFamily="2" charset="-78"/>
+                <a:ea typeface="Amiri" pitchFamily="2" charset="-78"/>
                 <a:cs typeface="Amiri" pitchFamily="2" charset="-78"/>
               </a:rPr>
               <a:t>الإِنْجْلِيزِيَّةُ</a:t>
@@ -21809,6 +21940,7 @@
                   <a:srgbClr val="1B3B6F"/>
                 </a:solidFill>
                 <a:latin typeface="Amiri" pitchFamily="2" charset="-78"/>
+                <a:ea typeface="Amiri" pitchFamily="2" charset="-78"/>
                 <a:cs typeface="Amiri" pitchFamily="2" charset="-78"/>
               </a:rPr>
               <a:t>اللُّغَةُ الأُمُّ</a:t>
@@ -21950,6 +22082,7 @@
                   <a:srgbClr val="1B3B6F"/>
                 </a:solidFill>
                 <a:latin typeface="Amiri" pitchFamily="2" charset="-78"/>
+                <a:ea typeface="Amiri" pitchFamily="2" charset="-78"/>
                 <a:cs typeface="Amiri" pitchFamily="2" charset="-78"/>
               </a:rPr>
               <a:t>العَرَبِيَّةُ وَالفَرَنْسِيَّةُ</a:t>
@@ -21988,6 +22121,7 @@
                   <a:srgbClr val="1B3B6F"/>
                 </a:solidFill>
                 <a:latin typeface="Amiri" pitchFamily="2" charset="-78"/>
+                <a:ea typeface="Amiri" pitchFamily="2" charset="-78"/>
                 <a:cs typeface="Amiri" pitchFamily="2" charset="-78"/>
               </a:rPr>
               <a:t>لُغَاتٌ أُخْرَى</a:t>
@@ -22129,6 +22263,7 @@
                   <a:srgbClr val="1B3B6F"/>
                 </a:solidFill>
                 <a:latin typeface="Amiri" pitchFamily="2" charset="-78"/>
+                <a:ea typeface="Amiri" pitchFamily="2" charset="-78"/>
                 <a:cs typeface="Amiri" pitchFamily="2" charset="-78"/>
               </a:rPr>
               <a:t>الأُرْدُنُّ</a:t>
@@ -22167,6 +22302,7 @@
                   <a:srgbClr val="1B3B6F"/>
                 </a:solidFill>
                 <a:latin typeface="Amiri" pitchFamily="2" charset="-78"/>
+                <a:ea typeface="Amiri" pitchFamily="2" charset="-78"/>
                 <a:cs typeface="Amiri" pitchFamily="2" charset="-78"/>
               </a:rPr>
               <a:t>البَلَدُ المَطْلُوبُ</a:t>
@@ -22308,6 +22444,7 @@
                   <a:srgbClr val="1B3B6F"/>
                 </a:solidFill>
                 <a:latin typeface="Amiri" pitchFamily="2" charset="-78"/>
+                <a:ea typeface="Amiri" pitchFamily="2" charset="-78"/>
                 <a:cs typeface="Amiri" pitchFamily="2" charset="-78"/>
               </a:rPr>
               <a:t>أُرِيدُ أَنْ أُحَسِّنَ لُغَتِيَ العَرَبِيَّةَ، لِأَنَّ النَّاسَ هُنَاكَ يَتَكَلَّمُونَهَا كُلَّ يَوْمٍ.</a:t>
@@ -22346,6 +22483,7 @@
                   <a:srgbClr val="1B3B6F"/>
                 </a:solidFill>
                 <a:latin typeface="Amiri" pitchFamily="2" charset="-78"/>
+                <a:ea typeface="Amiri" pitchFamily="2" charset="-78"/>
                 <a:cs typeface="Amiri" pitchFamily="2" charset="-78"/>
               </a:rPr>
               <a:t>جُمْلَةٌ: لِمَاذَا هٰذَا البَلَدُ؟</a:t>
@@ -22555,6 +22693,7 @@
                   <a:srgbClr val="D4AF37"/>
                 </a:solidFill>
                 <a:latin typeface="Amiri" pitchFamily="2" charset="-78"/>
+                <a:ea typeface="Amiri" pitchFamily="2" charset="-78"/>
                 <a:cs typeface="Amiri" pitchFamily="2" charset="-78"/>
               </a:rPr>
               <a:t>م</a:t>
@@ -22875,6 +23014,7 @@
                   <a:srgbClr val="8A6D1E"/>
                 </a:solidFill>
                 <a:latin typeface="Amiri" pitchFamily="2" charset="-78"/>
+                <a:ea typeface="Amiri" pitchFamily="2" charset="-78"/>
                 <a:cs typeface="Amiri" pitchFamily="2" charset="-78"/>
               </a:rPr>
               <a:t>رِسَالَةٌ إِلَى صَدِيقٍ جَدِيدٍ</a:t>
@@ -23350,6 +23490,7 @@
                   <a:srgbClr val="1B3B6F"/>
                 </a:solidFill>
                 <a:latin typeface="Amiri" pitchFamily="2" charset="-78"/>
+                <a:ea typeface="Amiri" pitchFamily="2" charset="-78"/>
                 <a:cs typeface="Amiri" pitchFamily="2" charset="-78"/>
               </a:rPr>
               <a:t>وُلِدْتُ فِي … لٰكِنَّ أَصْلَ أُسْرَتِي مِنْ …</a:t>
@@ -23426,6 +23567,7 @@
                   <a:srgbClr val="1B3B6F"/>
                 </a:solidFill>
                 <a:latin typeface="Amiri" pitchFamily="2" charset="-78"/>
+                <a:ea typeface="Amiri" pitchFamily="2" charset="-78"/>
                 <a:cs typeface="Amiri" pitchFamily="2" charset="-78"/>
               </a:rPr>
               <a:t>يَقَعُ … فِي … وَعَاصِمَتُهُ …</a:t>
@@ -23502,6 +23644,7 @@
                   <a:srgbClr val="1B3B6F"/>
                 </a:solidFill>
                 <a:latin typeface="Amiri" pitchFamily="2" charset="-78"/>
+                <a:ea typeface="Amiri" pitchFamily="2" charset="-78"/>
                 <a:cs typeface="Amiri" pitchFamily="2" charset="-78"/>
               </a:rPr>
               <a:t>أَتَكَلَّمُ … مَعَ …</a:t>
@@ -23578,6 +23721,7 @@
                   <a:srgbClr val="1B3B6F"/>
                 </a:solidFill>
                 <a:latin typeface="Amiri" pitchFamily="2" charset="-78"/>
+                <a:ea typeface="Amiri" pitchFamily="2" charset="-78"/>
                 <a:cs typeface="Amiri" pitchFamily="2" charset="-78"/>
               </a:rPr>
               <a:t>فِي المُسْتَقْبَلِ سَأَتَعَلَّمُ …</a:t>
@@ -23749,6 +23893,7 @@
                   <a:srgbClr val="D4AF37"/>
                 </a:solidFill>
                 <a:latin typeface="Amiri" pitchFamily="2" charset="-78"/>
+                <a:ea typeface="Amiri" pitchFamily="2" charset="-78"/>
                 <a:cs typeface="Amiri" pitchFamily="2" charset="-78"/>
               </a:rPr>
               <a:t>م</a:t>
@@ -24069,6 +24214,7 @@
                   <a:srgbClr val="8A6D1E"/>
                 </a:solidFill>
                 <a:latin typeface="Amiri" pitchFamily="2" charset="-78"/>
+                <a:ea typeface="Amiri" pitchFamily="2" charset="-78"/>
                 <a:cs typeface="Amiri" pitchFamily="2" charset="-78"/>
               </a:rPr>
               <a:t>نَصُّ السُّؤَالِ</a:t>
@@ -24349,6 +24495,7 @@
                   <a:srgbClr val="1B3B6F"/>
                 </a:solidFill>
                 <a:latin typeface="Amiri" pitchFamily="2" charset="-78"/>
+                <a:ea typeface="Amiri" pitchFamily="2" charset="-78"/>
                 <a:cs typeface="Amiri" pitchFamily="2" charset="-78"/>
               </a:rPr>
               <a:t>اكْتُبْ رِسَالَةً إِلَى صَدِيقِكَ الجَدِيدِ بِالمُرَاسَلَةِ (٨٠–٩٠ كَلِمَةً).</a:t>
@@ -24490,6 +24637,7 @@
                   <a:srgbClr val="1B3B6F"/>
                 </a:solidFill>
                 <a:latin typeface="Amiri" pitchFamily="2" charset="-78"/>
+                <a:ea typeface="Amiri" pitchFamily="2" charset="-78"/>
                 <a:cs typeface="Amiri" pitchFamily="2" charset="-78"/>
               </a:rPr>
               <a:t>أَيْنَ وُلِدْتَ؟ وَمَا جِنْسِيَّتُكَ؟</a:t>
@@ -24631,6 +24779,7 @@
                   <a:srgbClr val="1B3B6F"/>
                 </a:solidFill>
                 <a:latin typeface="Amiri" pitchFamily="2" charset="-78"/>
+                <a:ea typeface="Amiri" pitchFamily="2" charset="-78"/>
                 <a:cs typeface="Amiri" pitchFamily="2" charset="-78"/>
               </a:rPr>
               <a:t>أَيْنَ يَقَعُ بَلَدُ أُسْرَتِكَ؟ وَمَا عَاصِمَتُهُ؟</a:t>
@@ -24772,6 +24921,7 @@
                   <a:srgbClr val="1B3B6F"/>
                 </a:solidFill>
                 <a:latin typeface="Amiri" pitchFamily="2" charset="-78"/>
+                <a:ea typeface="Amiri" pitchFamily="2" charset="-78"/>
                 <a:cs typeface="Amiri" pitchFamily="2" charset="-78"/>
               </a:rPr>
               <a:t>مَا اللُّغَاتُ الَّتِي تَتَكَلَّمُهَا؟ وَمَعَ مَنْ؟</a:t>
@@ -24913,6 +25063,7 @@
                   <a:srgbClr val="1B3B6F"/>
                 </a:solidFill>
                 <a:latin typeface="Amiri" pitchFamily="2" charset="-78"/>
+                <a:ea typeface="Amiri" pitchFamily="2" charset="-78"/>
                 <a:cs typeface="Amiri" pitchFamily="2" charset="-78"/>
               </a:rPr>
               <a:t>مَا لُغَتُكَ المُفَضَّلَةُ؟ وَمَا اللُّغَةُ الَّتِي سَتَتَعَلَّمُهَا؟ وَاسْأَلْ صَدِيقَكَ سُؤَالًا.</a:t>
@@ -25122,6 +25273,7 @@
                   <a:srgbClr val="D4AF37"/>
                 </a:solidFill>
                 <a:latin typeface="Amiri" pitchFamily="2" charset="-78"/>
+                <a:ea typeface="Amiri" pitchFamily="2" charset="-78"/>
                 <a:cs typeface="Amiri" pitchFamily="2" charset="-78"/>
               </a:rPr>
               <a:t>م</a:t>
@@ -25442,6 +25594,7 @@
                   <a:srgbClr val="8A6D1E"/>
                 </a:solidFill>
                 <a:latin typeface="Amiri" pitchFamily="2" charset="-78"/>
+                <a:ea typeface="Amiri" pitchFamily="2" charset="-78"/>
                 <a:cs typeface="Amiri" pitchFamily="2" charset="-78"/>
               </a:rPr>
               <a:t>قَوَالِبُ الكِتَابَةِ</a:t>
@@ -25722,6 +25875,7 @@
                   <a:srgbClr val="1B3B6F"/>
                 </a:solidFill>
                 <a:latin typeface="Amiri" pitchFamily="2" charset="-78"/>
+                <a:ea typeface="Amiri" pitchFamily="2" charset="-78"/>
                 <a:cs typeface="Amiri" pitchFamily="2" charset="-78"/>
               </a:rPr>
               <a:t>مَرْحَبًا يَا ______ ، اسْمِي ______ .</a:t>
@@ -25928,6 +26082,7 @@
                   <a:srgbClr val="1B3B6F"/>
                 </a:solidFill>
                 <a:latin typeface="Amiri" pitchFamily="2" charset="-78"/>
+                <a:ea typeface="Amiri" pitchFamily="2" charset="-78"/>
                 <a:cs typeface="Amiri" pitchFamily="2" charset="-78"/>
               </a:rPr>
               <a:t>وُلِدْتُ فِي ______ ، وَأَنَا ______ .</a:t>
@@ -26134,6 +26289,7 @@
                   <a:srgbClr val="1B3B6F"/>
                 </a:solidFill>
                 <a:latin typeface="Amiri" pitchFamily="2" charset="-78"/>
+                <a:ea typeface="Amiri" pitchFamily="2" charset="-78"/>
                 <a:cs typeface="Amiri" pitchFamily="2" charset="-78"/>
               </a:rPr>
               <a:t>يَقَعُ ______ فِي ______ ، وَعَاصِمَتُهُ ______ .</a:t>
@@ -26340,6 +26496,7 @@
                   <a:srgbClr val="1B3B6F"/>
                 </a:solidFill>
                 <a:latin typeface="Amiri" pitchFamily="2" charset="-78"/>
+                <a:ea typeface="Amiri" pitchFamily="2" charset="-78"/>
                 <a:cs typeface="Amiri" pitchFamily="2" charset="-78"/>
               </a:rPr>
               <a:t>أَتَكَلَّمُ ______ مَعَ ______ ، وَ______ مَعَ ______ .</a:t>
@@ -26546,6 +26703,7 @@
                   <a:srgbClr val="1B3B6F"/>
                 </a:solidFill>
                 <a:latin typeface="Amiri" pitchFamily="2" charset="-78"/>
+                <a:ea typeface="Amiri" pitchFamily="2" charset="-78"/>
                 <a:cs typeface="Amiri" pitchFamily="2" charset="-78"/>
               </a:rPr>
               <a:t>لُغَتِيَ المُفَضَّلَةُ ______ . وَسَأَتَعَلَّمُ ______ .</a:t>
@@ -26752,6 +26910,7 @@
                   <a:srgbClr val="1B3B6F"/>
                 </a:solidFill>
                 <a:latin typeface="Amiri" pitchFamily="2" charset="-78"/>
+                <a:ea typeface="Amiri" pitchFamily="2" charset="-78"/>
                 <a:cs typeface="Amiri" pitchFamily="2" charset="-78"/>
               </a:rPr>
               <a:t>وَأَنْتَ، ______ ؟ مَعَ السَّلَامَةِ.</a:t>
@@ -26991,13 +27150,9 @@
     <a:fontScheme name="Office">
       <a:majorFont>
         <a:latin typeface="Calibri Light" panose="020F0302020204030204"/>
-        <a:ea typeface=""/>
-        <a:cs typeface=""/>
-        <a:font script="Jpan" typeface="游ゴシック Light"/>
-        <a:font script="Hang" typeface="맑은 고딕"/>
-        <a:font script="Hans" typeface="等线 Light"/>
-        <a:font script="Hant" typeface="新細明體"/>
-        <a:font script="Arab" typeface="Times New Roman"/>
+        <a:ea typeface="Amiri" pitchFamily="2" charset="-78"/>
+        <a:cs typeface="Amiri" pitchFamily="2" charset="-78"/>
+        <a:font script="Arab" typeface="Amiri"/>
         <a:font script="Hebr" typeface="Times New Roman"/>
         <a:font script="Thai" typeface="Angsana New"/>
         <a:font script="Ethi" typeface="Nyala"/>
@@ -27043,13 +27198,9 @@
       </a:majorFont>
       <a:minorFont>
         <a:latin typeface="Calibri" panose="020F0502020204030204"/>
-        <a:ea typeface=""/>
-        <a:cs typeface=""/>
-        <a:font script="Jpan" typeface="游ゴシック"/>
-        <a:font script="Hang" typeface="맑은 고딕"/>
-        <a:font script="Hans" typeface="等线"/>
-        <a:font script="Hant" typeface="新細明體"/>
-        <a:font script="Arab" typeface="Arial"/>
+        <a:ea typeface="Amiri" pitchFamily="2" charset="-78"/>
+        <a:cs typeface="Amiri" pitchFamily="2" charset="-78"/>
+        <a:font script="Arab" typeface="Amiri"/>
         <a:font script="Hebr" typeface="Arial"/>
         <a:font script="Thai" typeface="Cordia New"/>
         <a:font script="Ethi" typeface="Nyala"/>

--- a/Topic_E/Exam_Practice/TE-L01_Writing_Workshop_Countries_Nationalities_and_Languages.pptx
+++ b/Topic_E/Exam_Practice/TE-L01_Writing_Workshop_Countries_Nationalities_and_Languages.pptx
@@ -3852,7 +3852,7 @@
                 <a:solidFill>
                   <a:srgbClr val="FFFFFF"/>
                 </a:solidFill>
-                <a:latin typeface="Calibri" pitchFamily="34" charset="0"/>
+                <a:latin typeface="Amiri" pitchFamily="2" charset="-78"/>
                 <a:ea typeface="Amiri" pitchFamily="2" charset="-78"/>
                 <a:cs typeface="Amiri" pitchFamily="2" charset="-78"/>
               </a:rPr>
@@ -3918,7 +3918,7 @@
                 <a:solidFill>
                   <a:srgbClr val="FFFFFF"/>
                 </a:solidFill>
-                <a:latin typeface="Calibri" pitchFamily="34" charset="0"/>
+                <a:latin typeface="Amiri" pitchFamily="2" charset="-78"/>
                 <a:ea typeface="Amiri" pitchFamily="2" charset="-78"/>
                 <a:cs typeface="Amiri" pitchFamily="2" charset="-78"/>
               </a:rPr>
@@ -3984,7 +3984,7 @@
                 <a:solidFill>
                   <a:srgbClr val="FFFFFF"/>
                 </a:solidFill>
-                <a:latin typeface="Calibri" pitchFamily="34" charset="0"/>
+                <a:latin typeface="Amiri" pitchFamily="2" charset="-78"/>
                 <a:ea typeface="Amiri" pitchFamily="2" charset="-78"/>
                 <a:cs typeface="Amiri" pitchFamily="2" charset="-78"/>
               </a:rPr>
@@ -4050,7 +4050,7 @@
                 <a:solidFill>
                   <a:srgbClr val="FFFFFF"/>
                 </a:solidFill>
-                <a:latin typeface="Calibri" pitchFamily="34" charset="0"/>
+                <a:latin typeface="Amiri" pitchFamily="2" charset="-78"/>
                 <a:ea typeface="Amiri" pitchFamily="2" charset="-78"/>
                 <a:cs typeface="Amiri" pitchFamily="2" charset="-78"/>
               </a:rPr>
@@ -4848,7 +4848,7 @@
                 <a:solidFill>
                   <a:srgbClr val="FFFFFF"/>
                 </a:solidFill>
-                <a:latin typeface="Calibri" pitchFamily="34" charset="0"/>
+                <a:latin typeface="Amiri" pitchFamily="2" charset="-78"/>
                 <a:ea typeface="Amiri" pitchFamily="2" charset="-78"/>
                 <a:cs typeface="Amiri" pitchFamily="2" charset="-78"/>
               </a:rPr>
@@ -4914,7 +4914,7 @@
                 <a:solidFill>
                   <a:srgbClr val="FFFFFF"/>
                 </a:solidFill>
-                <a:latin typeface="Calibri" pitchFamily="34" charset="0"/>
+                <a:latin typeface="Amiri" pitchFamily="2" charset="-78"/>
                 <a:ea typeface="Amiri" pitchFamily="2" charset="-78"/>
                 <a:cs typeface="Amiri" pitchFamily="2" charset="-78"/>
               </a:rPr>
@@ -4980,7 +4980,7 @@
                 <a:solidFill>
                   <a:srgbClr val="FFFFFF"/>
                 </a:solidFill>
-                <a:latin typeface="Calibri" pitchFamily="34" charset="0"/>
+                <a:latin typeface="Amiri" pitchFamily="2" charset="-78"/>
                 <a:ea typeface="Amiri" pitchFamily="2" charset="-78"/>
                 <a:cs typeface="Amiri" pitchFamily="2" charset="-78"/>
               </a:rPr>
@@ -5046,7 +5046,7 @@
                 <a:solidFill>
                   <a:srgbClr val="FFFFFF"/>
                 </a:solidFill>
-                <a:latin typeface="Calibri" pitchFamily="34" charset="0"/>
+                <a:latin typeface="Amiri" pitchFamily="2" charset="-78"/>
                 <a:ea typeface="Amiri" pitchFamily="2" charset="-78"/>
                 <a:cs typeface="Amiri" pitchFamily="2" charset="-78"/>
               </a:rPr>
@@ -8603,7 +8603,7 @@
                 <a:solidFill>
                   <a:srgbClr val="FFFFFF"/>
                 </a:solidFill>
-                <a:latin typeface="Calibri" pitchFamily="34" charset="0"/>
+                <a:latin typeface="Amiri" pitchFamily="2" charset="-78"/>
                 <a:ea typeface="Amiri" pitchFamily="2" charset="-78"/>
                 <a:cs typeface="Amiri" pitchFamily="2" charset="-78"/>
               </a:rPr>
@@ -8669,7 +8669,7 @@
                 <a:solidFill>
                   <a:srgbClr val="FFFFFF"/>
                 </a:solidFill>
-                <a:latin typeface="Calibri" pitchFamily="34" charset="0"/>
+                <a:latin typeface="Amiri" pitchFamily="2" charset="-78"/>
                 <a:ea typeface="Amiri" pitchFamily="2" charset="-78"/>
                 <a:cs typeface="Amiri" pitchFamily="2" charset="-78"/>
               </a:rPr>
@@ -8735,7 +8735,7 @@
                 <a:solidFill>
                   <a:srgbClr val="FFFFFF"/>
                 </a:solidFill>
-                <a:latin typeface="Calibri" pitchFamily="34" charset="0"/>
+                <a:latin typeface="Amiri" pitchFamily="2" charset="-78"/>
                 <a:ea typeface="Amiri" pitchFamily="2" charset="-78"/>
                 <a:cs typeface="Amiri" pitchFamily="2" charset="-78"/>
               </a:rPr>
@@ -8801,7 +8801,7 @@
                 <a:solidFill>
                   <a:srgbClr val="FFFFFF"/>
                 </a:solidFill>
-                <a:latin typeface="Calibri" pitchFamily="34" charset="0"/>
+                <a:latin typeface="Amiri" pitchFamily="2" charset="-78"/>
                 <a:ea typeface="Amiri" pitchFamily="2" charset="-78"/>
                 <a:cs typeface="Amiri" pitchFamily="2" charset="-78"/>
               </a:rPr>
@@ -9588,7 +9588,7 @@
                 <a:solidFill>
                   <a:srgbClr val="FFFFFF"/>
                 </a:solidFill>
-                <a:latin typeface="Calibri" pitchFamily="34" charset="0"/>
+                <a:latin typeface="Amiri" pitchFamily="2" charset="-78"/>
                 <a:ea typeface="Amiri" pitchFamily="2" charset="-78"/>
                 <a:cs typeface="Amiri" pitchFamily="2" charset="-78"/>
               </a:rPr>
@@ -9654,7 +9654,7 @@
                 <a:solidFill>
                   <a:srgbClr val="FFFFFF"/>
                 </a:solidFill>
-                <a:latin typeface="Calibri" pitchFamily="34" charset="0"/>
+                <a:latin typeface="Amiri" pitchFamily="2" charset="-78"/>
                 <a:ea typeface="Amiri" pitchFamily="2" charset="-78"/>
                 <a:cs typeface="Amiri" pitchFamily="2" charset="-78"/>
               </a:rPr>
@@ -9720,7 +9720,7 @@
                 <a:solidFill>
                   <a:srgbClr val="FFFFFF"/>
                 </a:solidFill>
-                <a:latin typeface="Calibri" pitchFamily="34" charset="0"/>
+                <a:latin typeface="Amiri" pitchFamily="2" charset="-78"/>
                 <a:ea typeface="Amiri" pitchFamily="2" charset="-78"/>
                 <a:cs typeface="Amiri" pitchFamily="2" charset="-78"/>
               </a:rPr>
@@ -9786,7 +9786,7 @@
                 <a:solidFill>
                   <a:srgbClr val="FFFFFF"/>
                 </a:solidFill>
-                <a:latin typeface="Calibri" pitchFamily="34" charset="0"/>
+                <a:latin typeface="Amiri" pitchFamily="2" charset="-78"/>
                 <a:ea typeface="Amiri" pitchFamily="2" charset="-78"/>
                 <a:cs typeface="Amiri" pitchFamily="2" charset="-78"/>
               </a:rPr>
@@ -10573,7 +10573,7 @@
                 <a:solidFill>
                   <a:srgbClr val="FFFFFF"/>
                 </a:solidFill>
-                <a:latin typeface="Calibri" pitchFamily="34" charset="0"/>
+                <a:latin typeface="Amiri" pitchFamily="2" charset="-78"/>
                 <a:ea typeface="Amiri" pitchFamily="2" charset="-78"/>
                 <a:cs typeface="Amiri" pitchFamily="2" charset="-78"/>
               </a:rPr>
@@ -10639,7 +10639,7 @@
                 <a:solidFill>
                   <a:srgbClr val="FFFFFF"/>
                 </a:solidFill>
-                <a:latin typeface="Calibri" pitchFamily="34" charset="0"/>
+                <a:latin typeface="Amiri" pitchFamily="2" charset="-78"/>
                 <a:ea typeface="Amiri" pitchFamily="2" charset="-78"/>
                 <a:cs typeface="Amiri" pitchFamily="2" charset="-78"/>
               </a:rPr>
@@ -10705,7 +10705,7 @@
                 <a:solidFill>
                   <a:srgbClr val="FFFFFF"/>
                 </a:solidFill>
-                <a:latin typeface="Calibri" pitchFamily="34" charset="0"/>
+                <a:latin typeface="Amiri" pitchFamily="2" charset="-78"/>
                 <a:ea typeface="Amiri" pitchFamily="2" charset="-78"/>
                 <a:cs typeface="Amiri" pitchFamily="2" charset="-78"/>
               </a:rPr>
@@ -10771,7 +10771,7 @@
                 <a:solidFill>
                   <a:srgbClr val="FFFFFF"/>
                 </a:solidFill>
-                <a:latin typeface="Calibri" pitchFamily="34" charset="0"/>
+                <a:latin typeface="Amiri" pitchFamily="2" charset="-78"/>
                 <a:ea typeface="Amiri" pitchFamily="2" charset="-78"/>
                 <a:cs typeface="Amiri" pitchFamily="2" charset="-78"/>
               </a:rPr>
